--- a/Project/Neural_Network_Presentation.pptx
+++ b/Project/Neural_Network_Presentation.pptx
@@ -628,7 +628,10 @@
           <a:bodyPr/>
           <a:lstStyle/>
           <a:p>
-            <a:endParaRPr lang="en-US" dirty="0"/>
+            <a:r>
+              <a:rPr lang="en-US" dirty="0"/>
+              <a:t>-Austin</a:t>
+            </a:r>
           </a:p>
         </p:txBody>
       </p:sp>
@@ -712,6 +715,71 @@
           <a:bodyPr/>
           <a:lstStyle/>
           <a:p>
+            <a:r>
+              <a:rPr lang="en-US" dirty="0"/>
+              <a:t>-Anthony</a:t>
+            </a:r>
+          </a:p>
+          <a:p>
+            <a:endParaRPr lang="en-US" dirty="0"/>
+          </a:p>
+          <a:p>
+            <a:pPr marL="171450" indent="-171450">
+              <a:buFontTx/>
+              <a:buChar char="-"/>
+            </a:pPr>
+            <a:r>
+              <a:rPr lang="en-US" dirty="0"/>
+              <a:t>Learning rate: how much the Neural Network is allowed to move with each learning pass</a:t>
+            </a:r>
+          </a:p>
+          <a:p>
+            <a:pPr marL="171450" indent="-171450">
+              <a:buFontTx/>
+              <a:buChar char="-"/>
+            </a:pPr>
+            <a:endParaRPr lang="en-US" dirty="0"/>
+          </a:p>
+          <a:p>
+            <a:pPr marL="171450" indent="-171450">
+              <a:buFontTx/>
+              <a:buChar char="-"/>
+            </a:pPr>
+            <a:r>
+              <a:rPr lang="en-US" dirty="0"/>
+              <a:t>Batch size: the amount of images the Neural Network needs to analyze before updating the parameters</a:t>
+            </a:r>
+          </a:p>
+          <a:p>
+            <a:pPr marL="171450" indent="-171450">
+              <a:buFontTx/>
+              <a:buChar char="-"/>
+            </a:pPr>
+            <a:endParaRPr lang="en-US" dirty="0"/>
+          </a:p>
+          <a:p>
+            <a:pPr marL="171450" indent="-171450">
+              <a:buFontTx/>
+              <a:buChar char="-"/>
+            </a:pPr>
+            <a:r>
+              <a:rPr lang="en-US" dirty="0"/>
+              <a:t>Epochs: the amount of times we make the system go through </a:t>
+            </a:r>
+            <a:r>
+              <a:rPr lang="en-US" b="1" u="sng" dirty="0"/>
+              <a:t>ALL </a:t>
+            </a:r>
+            <a:r>
+              <a:rPr lang="en-US" b="0" u="none" dirty="0"/>
+              <a:t> of the data (all 60000 images) </a:t>
+            </a:r>
+          </a:p>
+          <a:p>
+            <a:pPr marL="171450" indent="-171450">
+              <a:buFontTx/>
+              <a:buChar char="-"/>
+            </a:pPr>
             <a:endParaRPr lang="en-US" dirty="0"/>
           </a:p>
         </p:txBody>
@@ -796,7 +864,40 @@
           <a:bodyPr/>
           <a:lstStyle/>
           <a:p>
+            <a:r>
+              <a:rPr lang="en-US" dirty="0"/>
+              <a:t>-Anthony</a:t>
+            </a:r>
+          </a:p>
+          <a:p>
             <a:endParaRPr lang="en-US" dirty="0"/>
+          </a:p>
+          <a:p>
+            <a:pPr marL="171450" indent="-171450">
+              <a:buFontTx/>
+              <a:buChar char="-"/>
+            </a:pPr>
+            <a:r>
+              <a:rPr lang="en-US" dirty="0"/>
+              <a:t>The results rapidly grow towards the 95% accuracy and then levels off with marginal gain for each epoch</a:t>
+            </a:r>
+          </a:p>
+          <a:p>
+            <a:pPr marL="171450" indent="-171450">
+              <a:buFontTx/>
+              <a:buChar char="-"/>
+            </a:pPr>
+            <a:endParaRPr lang="en-US" dirty="0"/>
+          </a:p>
+          <a:p>
+            <a:pPr marL="171450" indent="-171450">
+              <a:buFontTx/>
+              <a:buChar char="-"/>
+            </a:pPr>
+            <a:r>
+              <a:rPr lang="en-US" dirty="0"/>
+              <a:t>Total training time is two minutes</a:t>
+            </a:r>
           </a:p>
         </p:txBody>
       </p:sp>
@@ -880,7 +981,46 @@
           <a:bodyPr/>
           <a:lstStyle/>
           <a:p>
+            <a:r>
+              <a:rPr lang="en-US" dirty="0"/>
+              <a:t>-Austin</a:t>
+            </a:r>
+          </a:p>
+          <a:p>
             <a:endParaRPr lang="en-US" dirty="0"/>
+          </a:p>
+          <a:p>
+            <a:endParaRPr lang="en-US" dirty="0"/>
+          </a:p>
+          <a:p>
+            <a:pPr marL="171450" indent="-171450">
+              <a:buFontTx/>
+              <a:buChar char="-"/>
+            </a:pPr>
+            <a:r>
+              <a:rPr lang="en-US" dirty="0"/>
+              <a:t>Show off the pixels and where the NN looks for each number and how some numbers have the same “hot spot” which could cause an error</a:t>
+            </a:r>
+          </a:p>
+          <a:p>
+            <a:pPr marL="171450" indent="-171450">
+              <a:buFontTx/>
+              <a:buChar char="-"/>
+            </a:pPr>
+            <a:r>
+              <a:rPr lang="en-US" dirty="0"/>
+              <a:t>Or overlap</a:t>
+            </a:r>
+          </a:p>
+          <a:p>
+            <a:pPr marL="171450" indent="-171450">
+              <a:buFontTx/>
+              <a:buChar char="-"/>
+            </a:pPr>
+            <a:r>
+              <a:rPr lang="en-US" dirty="0"/>
+              <a:t>Or how the number could be a different number </a:t>
+            </a:r>
           </a:p>
         </p:txBody>
       </p:sp>
@@ -964,7 +1104,19 @@
           <a:bodyPr/>
           <a:lstStyle/>
           <a:p>
+            <a:r>
+              <a:rPr lang="en-US" dirty="0"/>
+              <a:t>-Austin</a:t>
+            </a:r>
+          </a:p>
+          <a:p>
             <a:endParaRPr lang="en-US" dirty="0"/>
+          </a:p>
+          <a:p>
+            <a:r>
+              <a:rPr lang="en-US" dirty="0"/>
+              <a:t>(show off the program on VS)</a:t>
+            </a:r>
           </a:p>
         </p:txBody>
       </p:sp>
@@ -1048,7 +1200,124 @@
           <a:bodyPr/>
           <a:lstStyle/>
           <a:p>
+            <a:pPr marL="171450" indent="-171450">
+              <a:buFontTx/>
+              <a:buChar char="-"/>
+            </a:pPr>
+            <a:r>
+              <a:rPr lang="en-US" dirty="0"/>
+              <a:t>Austin</a:t>
+            </a:r>
+          </a:p>
+          <a:p>
+            <a:pPr marL="171450" indent="-171450">
+              <a:buFontTx/>
+              <a:buChar char="-"/>
+            </a:pPr>
             <a:endParaRPr lang="en-US" dirty="0"/>
+          </a:p>
+          <a:p>
+            <a:pPr marL="171450" indent="-171450">
+              <a:buFontTx/>
+              <a:buChar char="-"/>
+            </a:pPr>
+            <a:r>
+              <a:rPr lang="en-US" dirty="0" err="1"/>
+              <a:t>Init_weights</a:t>
+            </a:r>
+            <a:r>
+              <a:rPr lang="en-US" dirty="0"/>
+              <a:t> = random weights</a:t>
+            </a:r>
+          </a:p>
+          <a:p>
+            <a:pPr marL="171450" indent="-171450">
+              <a:buFontTx/>
+              <a:buChar char="-"/>
+            </a:pPr>
+            <a:endParaRPr lang="en-US" dirty="0"/>
+          </a:p>
+          <a:p>
+            <a:pPr marL="171450" indent="-171450">
+              <a:buFontTx/>
+              <a:buChar char="-"/>
+            </a:pPr>
+            <a:r>
+              <a:rPr lang="en-US" dirty="0"/>
+              <a:t>Forward() = takes an image and throws it through the program</a:t>
+            </a:r>
+          </a:p>
+          <a:p>
+            <a:pPr marL="171450" indent="-171450">
+              <a:buFontTx/>
+              <a:buChar char="-"/>
+            </a:pPr>
+            <a:endParaRPr lang="en-US" dirty="0"/>
+          </a:p>
+          <a:p>
+            <a:pPr marL="171450" indent="-171450">
+              <a:buFontTx/>
+              <a:buChar char="-"/>
+            </a:pPr>
+            <a:r>
+              <a:rPr lang="en-US" dirty="0"/>
+              <a:t>Backward() = chain rule and fine tuning the weights</a:t>
+            </a:r>
+          </a:p>
+          <a:p>
+            <a:pPr marL="171450" indent="-171450">
+              <a:buFontTx/>
+              <a:buChar char="-"/>
+            </a:pPr>
+            <a:endParaRPr lang="en-US" dirty="0"/>
+          </a:p>
+          <a:p>
+            <a:pPr marL="171450" indent="-171450">
+              <a:buFontTx/>
+              <a:buChar char="-"/>
+            </a:pPr>
+            <a:r>
+              <a:rPr lang="en-US" dirty="0"/>
+              <a:t>Update() = updating each of the weights and bias</a:t>
+            </a:r>
+          </a:p>
+          <a:p>
+            <a:pPr marL="171450" indent="-171450">
+              <a:buFontTx/>
+              <a:buChar char="-"/>
+            </a:pPr>
+            <a:endParaRPr lang="en-US" dirty="0"/>
+          </a:p>
+          <a:p>
+            <a:pPr marL="171450" indent="-171450">
+              <a:buFontTx/>
+              <a:buChar char="-"/>
+            </a:pPr>
+            <a:r>
+              <a:rPr lang="en-US" dirty="0" err="1"/>
+              <a:t>Load_mnist</a:t>
+            </a:r>
+            <a:r>
+              <a:rPr lang="en-US" dirty="0"/>
+              <a:t>() = load the images into a sorted order so the system has an easier time</a:t>
+            </a:r>
+          </a:p>
+          <a:p>
+            <a:pPr marL="171450" indent="-171450">
+              <a:buFontTx/>
+              <a:buChar char="-"/>
+            </a:pPr>
+            <a:endParaRPr lang="en-US" dirty="0"/>
+          </a:p>
+          <a:p>
+            <a:pPr marL="171450" indent="-171450">
+              <a:buFontTx/>
+              <a:buChar char="-"/>
+            </a:pPr>
+            <a:r>
+              <a:rPr lang="en-US" dirty="0"/>
+              <a:t>Main() = where the magic happens :)</a:t>
+            </a:r>
           </a:p>
         </p:txBody>
       </p:sp>
@@ -1132,6 +1401,73 @@
           <a:bodyPr/>
           <a:lstStyle/>
           <a:p>
+            <a:r>
+              <a:rPr lang="en-US" dirty="0"/>
+              <a:t>-Austin</a:t>
+            </a:r>
+          </a:p>
+          <a:p>
+            <a:endParaRPr lang="en-US" dirty="0"/>
+          </a:p>
+          <a:p>
+            <a:pPr marL="171450" indent="-171450">
+              <a:buFontTx/>
+              <a:buChar char="-"/>
+            </a:pPr>
+            <a:r>
+              <a:rPr lang="en-US" dirty="0"/>
+              <a:t>In conclusion… </a:t>
+            </a:r>
+          </a:p>
+          <a:p>
+            <a:pPr marL="171450" indent="-171450">
+              <a:buFontTx/>
+              <a:buChar char="-"/>
+            </a:pPr>
+            <a:r>
+              <a:rPr lang="en-US" dirty="0"/>
+              <a:t>This was an interesting and very educational project showing off the world of AI and low level language barrier challenges</a:t>
+            </a:r>
+          </a:p>
+          <a:p>
+            <a:pPr marL="171450" indent="-171450">
+              <a:buFontTx/>
+              <a:buChar char="-"/>
+            </a:pPr>
+            <a:endParaRPr lang="en-US" dirty="0"/>
+          </a:p>
+          <a:p>
+            <a:pPr marL="171450" indent="-171450">
+              <a:buFontTx/>
+              <a:buChar char="-"/>
+            </a:pPr>
+            <a:r>
+              <a:rPr lang="en-US" dirty="0"/>
+              <a:t>Future work:</a:t>
+            </a:r>
+            <a:br>
+              <a:rPr lang="en-US" dirty="0"/>
+            </a:br>
+            <a:r>
+              <a:rPr lang="en-US" dirty="0"/>
+              <a:t>make it bigger and develop it so we can have the system recognize letters </a:t>
+            </a:r>
+          </a:p>
+          <a:p>
+            <a:pPr marL="171450" indent="-171450">
+              <a:buFontTx/>
+              <a:buChar char="-"/>
+            </a:pPr>
+            <a:r>
+              <a:rPr lang="en-US" dirty="0"/>
+              <a:t>(of if were getting fancy) images! </a:t>
+            </a:r>
+          </a:p>
+          <a:p>
+            <a:pPr marL="171450" indent="-171450">
+              <a:buFontTx/>
+              <a:buChar char="-"/>
+            </a:pPr>
             <a:endParaRPr lang="en-US" dirty="0"/>
           </a:p>
         </p:txBody>
@@ -1216,7 +1552,36 @@
           <a:bodyPr/>
           <a:lstStyle/>
           <a:p>
+            <a:r>
+              <a:rPr lang="en-US" dirty="0"/>
+              <a:t>(don’t be </a:t>
+            </a:r>
+            <a:r>
+              <a:rPr lang="en-US" dirty="0" err="1"/>
+              <a:t>stoopid</a:t>
+            </a:r>
+            <a:r>
+              <a:rPr lang="en-US" dirty="0"/>
+              <a:t> lmao)</a:t>
+            </a:r>
+            <a:br>
+              <a:rPr lang="en-US" dirty="0"/>
+            </a:br>
             <a:endParaRPr lang="en-US" dirty="0"/>
+          </a:p>
+          <a:p>
+            <a:r>
+              <a:rPr lang="en-US" dirty="0"/>
+              <a:t>(thank </a:t>
+            </a:r>
+            <a:r>
+              <a:rPr lang="en-US" dirty="0" err="1"/>
+              <a:t>yall</a:t>
+            </a:r>
+            <a:r>
+              <a:rPr lang="en-US" dirty="0"/>
+              <a:t> for helping with the presentation)</a:t>
+            </a:r>
           </a:p>
         </p:txBody>
       </p:sp>
@@ -1300,7 +1665,82 @@
           <a:bodyPr/>
           <a:lstStyle/>
           <a:p>
+            <a:r>
+              <a:rPr lang="en-US" dirty="0"/>
+              <a:t>-Austin</a:t>
+            </a:r>
+          </a:p>
+          <a:p>
             <a:endParaRPr lang="en-US" dirty="0"/>
+          </a:p>
+          <a:p>
+            <a:pPr marL="171450" indent="-171450">
+              <a:buFontTx/>
+              <a:buChar char="-"/>
+            </a:pPr>
+            <a:r>
+              <a:rPr lang="en-US" dirty="0"/>
+              <a:t>Problem: it looks cool and I wanted to do it</a:t>
+            </a:r>
+          </a:p>
+          <a:p>
+            <a:pPr marL="171450" indent="-171450">
+              <a:buFontTx/>
+              <a:buChar char="-"/>
+            </a:pPr>
+            <a:endParaRPr lang="en-US" dirty="0"/>
+          </a:p>
+          <a:p>
+            <a:pPr marL="171450" indent="-171450">
+              <a:buFontTx/>
+              <a:buChar char="-"/>
+            </a:pPr>
+            <a:r>
+              <a:rPr lang="en-US" dirty="0"/>
+              <a:t>Methodology: math, loops, matrix (but we never covered that)</a:t>
+            </a:r>
+          </a:p>
+          <a:p>
+            <a:pPr marL="171450" indent="-171450">
+              <a:buFontTx/>
+              <a:buChar char="-"/>
+            </a:pPr>
+            <a:endParaRPr lang="en-US" dirty="0"/>
+          </a:p>
+          <a:p>
+            <a:pPr marL="171450" indent="-171450">
+              <a:buFontTx/>
+              <a:buChar char="-"/>
+            </a:pPr>
+            <a:r>
+              <a:rPr lang="en-US" dirty="0"/>
+              <a:t>Results: the app itself + 97.7 accuracy</a:t>
+            </a:r>
+          </a:p>
+          <a:p>
+            <a:pPr marL="171450" indent="-171450">
+              <a:buFontTx/>
+              <a:buChar char="-"/>
+            </a:pPr>
+            <a:endParaRPr lang="en-US" dirty="0"/>
+          </a:p>
+          <a:p>
+            <a:pPr marL="171450" indent="-171450">
+              <a:buFontTx/>
+              <a:buChar char="-"/>
+            </a:pPr>
+            <a:r>
+              <a:rPr lang="en-US" dirty="0"/>
+              <a:t>Conclusion: </a:t>
+            </a:r>
+            <a:r>
+              <a:rPr lang="en-US" dirty="0" err="1"/>
+              <a:t>youll</a:t>
+            </a:r>
+            <a:r>
+              <a:rPr lang="en-US" dirty="0"/>
+              <a:t> see at the end of the slides :)</a:t>
+            </a:r>
           </a:p>
         </p:txBody>
       </p:sp>
@@ -1384,7 +1824,42 @@
           <a:bodyPr/>
           <a:lstStyle/>
           <a:p>
+            <a:r>
+              <a:rPr lang="en-US" dirty="0"/>
+              <a:t>-Jackson</a:t>
+            </a:r>
+          </a:p>
+          <a:p>
             <a:endParaRPr lang="en-US" dirty="0"/>
+          </a:p>
+          <a:p>
+            <a:r>
+              <a:rPr lang="en-US" dirty="0"/>
+              <a:t>-</a:t>
+            </a:r>
+            <a:r>
+              <a:rPr lang="en-US" b="1" u="sng" dirty="0"/>
+              <a:t>Explain</a:t>
+            </a:r>
+            <a:r>
+              <a:rPr lang="en-US" dirty="0"/>
+              <a:t> </a:t>
+            </a:r>
+          </a:p>
+          <a:p>
+            <a:r>
+              <a:rPr lang="en-US" dirty="0"/>
+              <a:t>The MNIST data and how the data was needed because it is filtered and we can easily use it to train the Neural Network</a:t>
+            </a:r>
+          </a:p>
+          <a:p>
+            <a:endParaRPr lang="en-US" dirty="0"/>
+          </a:p>
+          <a:p>
+            <a:r>
+              <a:rPr lang="en-US" dirty="0"/>
+              <a:t>This matters because we can accurately tell the system if a guess is right or wrong because the data we used to train it was already classified</a:t>
+            </a:r>
           </a:p>
         </p:txBody>
       </p:sp>
@@ -1468,6 +1943,55 @@
           <a:bodyPr/>
           <a:lstStyle/>
           <a:p>
+            <a:r>
+              <a:rPr lang="en-US" dirty="0"/>
+              <a:t>-Jackson</a:t>
+            </a:r>
+          </a:p>
+          <a:p>
+            <a:endParaRPr lang="en-US" dirty="0"/>
+          </a:p>
+          <a:p>
+            <a:r>
+              <a:rPr lang="en-US" dirty="0"/>
+              <a:t>-</a:t>
+            </a:r>
+            <a:r>
+              <a:rPr lang="en-US" b="1" u="sng" dirty="0"/>
+              <a:t>Explain</a:t>
+            </a:r>
+          </a:p>
+          <a:p>
+            <a:r>
+              <a:rPr lang="en-US" dirty="0"/>
+              <a:t>everything hardcoded. No libraries, no containers, just raw code</a:t>
+            </a:r>
+          </a:p>
+          <a:p>
+            <a:endParaRPr lang="en-US" dirty="0"/>
+          </a:p>
+          <a:p>
+            <a:r>
+              <a:rPr lang="en-US" dirty="0"/>
+              <a:t>-A deeper understanding of how each neuron learns and how the whole system is built</a:t>
+            </a:r>
+          </a:p>
+          <a:p>
+            <a:endParaRPr lang="en-US" dirty="0"/>
+          </a:p>
+          <a:p>
+            <a:r>
+              <a:rPr lang="en-US" dirty="0"/>
+              <a:t>-the whole system is built in C </a:t>
+            </a:r>
+          </a:p>
+          <a:p>
+            <a:r>
+              <a:rPr lang="en-US" dirty="0"/>
+              <a:t>The Neural Network itself is built in 189 lines of code</a:t>
+            </a:r>
+          </a:p>
+          <a:p>
             <a:endParaRPr lang="en-US" dirty="0"/>
           </a:p>
         </p:txBody>
@@ -1552,7 +2076,51 @@
           <a:bodyPr/>
           <a:lstStyle/>
           <a:p>
+            <a:pPr marL="171450" indent="-171450">
+              <a:buFontTx/>
+              <a:buChar char="-"/>
+            </a:pPr>
+            <a:r>
+              <a:rPr lang="en-US" dirty="0"/>
+              <a:t>Jackson</a:t>
+            </a:r>
+          </a:p>
+          <a:p>
+            <a:pPr marL="171450" indent="-171450">
+              <a:buFontTx/>
+              <a:buChar char="-"/>
+            </a:pPr>
             <a:endParaRPr lang="en-US" dirty="0"/>
+          </a:p>
+          <a:p>
+            <a:pPr marL="171450" indent="-171450">
+              <a:buFontTx/>
+              <a:buChar char="-"/>
+            </a:pPr>
+            <a:r>
+              <a:rPr lang="en-US" dirty="0"/>
+              <a:t>784 = 1 for each pixel in the image</a:t>
+            </a:r>
+          </a:p>
+          <a:p>
+            <a:pPr marL="171450" indent="-171450">
+              <a:buFontTx/>
+              <a:buChar char="-"/>
+            </a:pPr>
+            <a:r>
+              <a:rPr lang="en-US" dirty="0"/>
+              <a:t>128 = better accuracy</a:t>
+            </a:r>
+          </a:p>
+          <a:p>
+            <a:pPr marL="171450" indent="-171450">
+              <a:buFontTx/>
+              <a:buChar char="-"/>
+            </a:pPr>
+            <a:r>
+              <a:rPr lang="en-US" dirty="0"/>
+              <a:t>10 = 0-9 (output)</a:t>
+            </a:r>
           </a:p>
         </p:txBody>
       </p:sp>
@@ -1636,7 +2204,90 @@
           <a:bodyPr/>
           <a:lstStyle/>
           <a:p>
+            <a:pPr marL="171450" indent="-171450">
+              <a:buFontTx/>
+              <a:buChar char="-"/>
+            </a:pPr>
+            <a:r>
+              <a:rPr lang="en-US" dirty="0"/>
+              <a:t>Austin </a:t>
+            </a:r>
+          </a:p>
+          <a:p>
+            <a:pPr marL="171450" indent="-171450">
+              <a:buFontTx/>
+              <a:buChar char="-"/>
+            </a:pPr>
             <a:endParaRPr lang="en-US" dirty="0"/>
+          </a:p>
+          <a:p>
+            <a:pPr marL="171450" indent="-171450">
+              <a:buFontTx/>
+              <a:buChar char="-"/>
+            </a:pPr>
+            <a:r>
+              <a:rPr lang="en-US" dirty="0"/>
+              <a:t>The formula for each neuron </a:t>
+            </a:r>
+          </a:p>
+          <a:p>
+            <a:pPr marL="171450" indent="-171450">
+              <a:buFontTx/>
+              <a:buChar char="-"/>
+            </a:pPr>
+            <a:r>
+              <a:rPr lang="en-US" dirty="0"/>
+              <a:t>Z = W1 * X1 …</a:t>
+            </a:r>
+          </a:p>
+          <a:p>
+            <a:pPr marL="171450" indent="-171450">
+              <a:buFontTx/>
+              <a:buChar char="-"/>
+            </a:pPr>
+            <a:r>
+              <a:rPr lang="en-US" dirty="0"/>
+              <a:t>Activation function = </a:t>
+            </a:r>
+            <a:r>
+              <a:rPr lang="en-US" dirty="0" err="1"/>
+              <a:t>ReLU</a:t>
+            </a:r>
+            <a:endParaRPr lang="en-US" dirty="0"/>
+          </a:p>
+          <a:p>
+            <a:pPr marL="171450" indent="-171450">
+              <a:buFontTx/>
+              <a:buChar char="-"/>
+            </a:pPr>
+            <a:r>
+              <a:rPr lang="en-US" dirty="0"/>
+              <a:t>Explain how the activation function works</a:t>
+            </a:r>
+          </a:p>
+          <a:p>
+            <a:pPr marL="171450" indent="-171450">
+              <a:buFontTx/>
+              <a:buChar char="-"/>
+            </a:pPr>
+            <a:endParaRPr lang="en-US" dirty="0"/>
+          </a:p>
+          <a:p>
+            <a:pPr marL="171450" indent="-171450">
+              <a:buFontTx/>
+              <a:buChar char="-"/>
+            </a:pPr>
+            <a:endParaRPr lang="en-US" dirty="0"/>
+          </a:p>
+          <a:p>
+            <a:pPr marL="171450" indent="-171450">
+              <a:buFontTx/>
+              <a:buChar char="-"/>
+            </a:pPr>
+            <a:r>
+              <a:rPr lang="en-US" dirty="0"/>
+              <a:t>(open VS and start the training process as it will take a little bit of time)</a:t>
+            </a:r>
           </a:p>
         </p:txBody>
       </p:sp>
@@ -1720,6 +2371,58 @@
           <a:bodyPr/>
           <a:lstStyle/>
           <a:p>
+            <a:pPr marL="171450" indent="-171450">
+              <a:buFontTx/>
+              <a:buChar char="-"/>
+            </a:pPr>
+            <a:r>
+              <a:rPr lang="en-US" dirty="0"/>
+              <a:t>Austin</a:t>
+            </a:r>
+          </a:p>
+          <a:p>
+            <a:pPr marL="171450" indent="-171450">
+              <a:buFontTx/>
+              <a:buChar char="-"/>
+            </a:pPr>
+            <a:endParaRPr lang="en-US" dirty="0"/>
+          </a:p>
+          <a:p>
+            <a:pPr marL="171450" indent="-171450">
+              <a:buFontTx/>
+              <a:buChar char="-"/>
+            </a:pPr>
+            <a:r>
+              <a:rPr lang="en-US" dirty="0"/>
+              <a:t>We need an activation function for each neuron so that each neuron can make a decision on if it should fire or not.</a:t>
+            </a:r>
+          </a:p>
+          <a:p>
+            <a:pPr marL="171450" indent="-171450">
+              <a:buFontTx/>
+              <a:buChar char="-"/>
+            </a:pPr>
+            <a:endParaRPr lang="en-US" dirty="0"/>
+          </a:p>
+          <a:p>
+            <a:pPr marL="171450" indent="-171450">
+              <a:buFontTx/>
+              <a:buChar char="-"/>
+            </a:pPr>
+            <a:r>
+              <a:rPr lang="en-US" dirty="0" err="1"/>
+              <a:t>Softmax</a:t>
+            </a:r>
+            <a:r>
+              <a:rPr lang="en-US" dirty="0"/>
+              <a:t> is how we compute the final layer into an actual probability distribution.</a:t>
+            </a:r>
+          </a:p>
+          <a:p>
+            <a:pPr marL="171450" indent="-171450">
+              <a:buFontTx/>
+              <a:buChar char="-"/>
+            </a:pPr>
             <a:endParaRPr lang="en-US" dirty="0"/>
           </a:p>
         </p:txBody>
@@ -1804,7 +2507,14 @@
           <a:bodyPr/>
           <a:lstStyle/>
           <a:p>
-            <a:endParaRPr lang="en-US" dirty="0"/>
+            <a:pPr marL="171450" indent="-171450">
+              <a:buFontTx/>
+              <a:buChar char="-"/>
+            </a:pPr>
+            <a:r>
+              <a:rPr lang="en-US" dirty="0"/>
+              <a:t>Austin</a:t>
+            </a:r>
           </a:p>
         </p:txBody>
       </p:sp>
@@ -1888,7 +2598,10 @@
           <a:bodyPr/>
           <a:lstStyle/>
           <a:p>
-            <a:endParaRPr lang="en-US" dirty="0"/>
+            <a:r>
+              <a:rPr lang="en-US" dirty="0"/>
+              <a:t>-Austin</a:t>
+            </a:r>
           </a:p>
         </p:txBody>
       </p:sp>
@@ -3807,298 +4520,42 @@
                 <a:ea typeface="Calibri" pitchFamily="34" charset="-122"/>
                 <a:cs typeface="Calibri" pitchFamily="34" charset="-120"/>
               </a:rPr>
-              <a:t>Out of 10,000 test images the network has never seen:</a:t>
+              <a:t>Out of 10,000 test images the network has never seen this is what the network “looks for”:</a:t>
             </a:r>
             <a:endParaRPr lang="en-US" sz="1400" dirty="0"/>
           </a:p>
         </p:txBody>
       </p:sp>
-      <p:sp>
-        <p:nvSpPr>
-          <p:cNvPr id="7" name="Shape 5"/>
-          <p:cNvSpPr/>
-          <p:nvPr/>
-        </p:nvSpPr>
-        <p:spPr>
-          <a:xfrm>
-            <a:off x="548640" y="1920240"/>
-            <a:ext cx="3840480" cy="1828800"/>
-          </a:xfrm>
-          <a:prstGeom prst="rect">
-            <a:avLst/>
-          </a:prstGeom>
-          <a:solidFill>
-            <a:srgbClr val="111B2E"/>
-          </a:solidFill>
-          <a:ln/>
-          <a:effectLst>
-            <a:outerShdw blurRad="101600" dist="38100" dir="8100000" algn="bl" rotWithShape="0">
-              <a:srgbClr val="000000">
-                <a:alpha val="30000"/>
-              </a:srgbClr>
-            </a:outerShdw>
-          </a:effectLst>
-        </p:spPr>
-        <p:txBody>
-          <a:bodyPr/>
-          <a:lstStyle/>
-          <a:p>
-            <a:endParaRPr lang="en-US"/>
-          </a:p>
-        </p:txBody>
-      </p:sp>
-      <p:sp>
-        <p:nvSpPr>
-          <p:cNvPr id="8" name="Text 6"/>
-          <p:cNvSpPr/>
-          <p:nvPr/>
-        </p:nvSpPr>
-        <p:spPr>
-          <a:xfrm>
-            <a:off x="548640" y="2011680"/>
-            <a:ext cx="3840480" cy="914400"/>
-          </a:xfrm>
-          <a:prstGeom prst="rect">
-            <a:avLst/>
-          </a:prstGeom>
-          <a:noFill/>
-          <a:ln/>
-        </p:spPr>
-        <p:txBody>
-          <a:bodyPr wrap="square" lIns="0" tIns="0" rIns="0" bIns="0" rtlCol="0" anchor="ctr"/>
-          <a:lstStyle/>
-          <a:p>
-            <a:pPr marL="0" indent="0" algn="ctr">
-              <a:buNone/>
-            </a:pPr>
-            <a:r>
-              <a:rPr lang="en-US" sz="5400" b="1" dirty="0">
-                <a:solidFill>
-                  <a:srgbClr val="34D399"/>
-                </a:solidFill>
-                <a:latin typeface="Consolas" pitchFamily="34" charset="0"/>
-                <a:ea typeface="Consolas" pitchFamily="34" charset="-122"/>
-                <a:cs typeface="Consolas" pitchFamily="34" charset="-120"/>
-              </a:rPr>
-              <a:t>9,780</a:t>
-            </a:r>
-            <a:endParaRPr lang="en-US" sz="5400" dirty="0"/>
-          </a:p>
-        </p:txBody>
-      </p:sp>
-      <p:sp>
-        <p:nvSpPr>
-          <p:cNvPr id="9" name="Text 7"/>
-          <p:cNvSpPr/>
-          <p:nvPr/>
-        </p:nvSpPr>
-        <p:spPr>
-          <a:xfrm>
-            <a:off x="548640" y="2926080"/>
-            <a:ext cx="3840480" cy="365760"/>
-          </a:xfrm>
-          <a:prstGeom prst="rect">
-            <a:avLst/>
-          </a:prstGeom>
-          <a:noFill/>
-          <a:ln/>
-        </p:spPr>
-        <p:txBody>
-          <a:bodyPr wrap="square" lIns="0" tIns="0" rIns="0" bIns="0" rtlCol="0" anchor="ctr"/>
-          <a:lstStyle/>
-          <a:p>
-            <a:pPr marL="0" indent="0" algn="ctr">
-              <a:buNone/>
-            </a:pPr>
-            <a:r>
-              <a:rPr lang="en-US" sz="1200" kern="0" spc="400" dirty="0">
-                <a:solidFill>
-                  <a:srgbClr val="64748B"/>
-                </a:solidFill>
-                <a:latin typeface="Calibri" pitchFamily="34" charset="0"/>
-                <a:ea typeface="Calibri" pitchFamily="34" charset="-122"/>
-                <a:cs typeface="Calibri" pitchFamily="34" charset="-120"/>
-              </a:rPr>
-              <a:t>CORRECT</a:t>
-            </a:r>
-            <a:endParaRPr lang="en-US" sz="1200" dirty="0"/>
-          </a:p>
-        </p:txBody>
-      </p:sp>
-      <p:sp>
-        <p:nvSpPr>
-          <p:cNvPr id="10" name="Shape 8"/>
-          <p:cNvSpPr/>
-          <p:nvPr/>
-        </p:nvSpPr>
-        <p:spPr>
-          <a:xfrm>
-            <a:off x="4754880" y="1920240"/>
-            <a:ext cx="3840480" cy="1828800"/>
-          </a:xfrm>
-          <a:prstGeom prst="rect">
-            <a:avLst/>
-          </a:prstGeom>
-          <a:solidFill>
-            <a:srgbClr val="111B2E"/>
-          </a:solidFill>
-          <a:ln/>
-          <a:effectLst>
-            <a:outerShdw blurRad="101600" dist="38100" dir="8100000" algn="bl" rotWithShape="0">
-              <a:srgbClr val="000000">
-                <a:alpha val="30000"/>
-              </a:srgbClr>
-            </a:outerShdw>
-          </a:effectLst>
-        </p:spPr>
-        <p:txBody>
-          <a:bodyPr/>
-          <a:lstStyle/>
-          <a:p>
-            <a:endParaRPr lang="en-US"/>
-          </a:p>
-        </p:txBody>
-      </p:sp>
-      <p:sp>
-        <p:nvSpPr>
-          <p:cNvPr id="11" name="Text 9"/>
-          <p:cNvSpPr/>
-          <p:nvPr/>
-        </p:nvSpPr>
-        <p:spPr>
-          <a:xfrm>
-            <a:off x="4754880" y="2011680"/>
-            <a:ext cx="3840480" cy="914400"/>
-          </a:xfrm>
-          <a:prstGeom prst="rect">
-            <a:avLst/>
-          </a:prstGeom>
-          <a:noFill/>
-          <a:ln/>
-        </p:spPr>
-        <p:txBody>
-          <a:bodyPr wrap="square" lIns="0" tIns="0" rIns="0" bIns="0" rtlCol="0" anchor="ctr"/>
-          <a:lstStyle/>
-          <a:p>
-            <a:pPr marL="0" indent="0" algn="ctr">
-              <a:buNone/>
-            </a:pPr>
-            <a:r>
-              <a:rPr lang="en-US" sz="5400" b="1" dirty="0">
-                <a:solidFill>
-                  <a:srgbClr val="F87171"/>
-                </a:solidFill>
-                <a:latin typeface="Consolas" pitchFamily="34" charset="0"/>
-                <a:ea typeface="Consolas" pitchFamily="34" charset="-122"/>
-                <a:cs typeface="Consolas" pitchFamily="34" charset="-120"/>
-              </a:rPr>
-              <a:t>~220</a:t>
-            </a:r>
-            <a:endParaRPr lang="en-US" sz="5400" dirty="0"/>
-          </a:p>
-        </p:txBody>
-      </p:sp>
-      <p:sp>
-        <p:nvSpPr>
-          <p:cNvPr id="12" name="Text 10"/>
-          <p:cNvSpPr/>
-          <p:nvPr/>
-        </p:nvSpPr>
-        <p:spPr>
-          <a:xfrm>
-            <a:off x="4754880" y="2926080"/>
-            <a:ext cx="3840480" cy="365760"/>
-          </a:xfrm>
-          <a:prstGeom prst="rect">
-            <a:avLst/>
-          </a:prstGeom>
-          <a:noFill/>
-          <a:ln/>
-        </p:spPr>
-        <p:txBody>
-          <a:bodyPr wrap="square" lIns="0" tIns="0" rIns="0" bIns="0" rtlCol="0" anchor="ctr"/>
-          <a:lstStyle/>
-          <a:p>
-            <a:pPr marL="0" indent="0" algn="ctr">
-              <a:buNone/>
-            </a:pPr>
-            <a:r>
-              <a:rPr lang="en-US" sz="1200" kern="0" spc="400" dirty="0">
-                <a:solidFill>
-                  <a:srgbClr val="64748B"/>
-                </a:solidFill>
-                <a:latin typeface="Calibri" pitchFamily="34" charset="0"/>
-                <a:ea typeface="Calibri" pitchFamily="34" charset="-122"/>
-                <a:cs typeface="Calibri" pitchFamily="34" charset="-120"/>
-              </a:rPr>
-              <a:t>WRONG</a:t>
-            </a:r>
-            <a:endParaRPr lang="en-US" sz="1200" dirty="0"/>
-          </a:p>
-        </p:txBody>
-      </p:sp>
-      <p:sp>
-        <p:nvSpPr>
-          <p:cNvPr id="13" name="Text 11"/>
-          <p:cNvSpPr/>
-          <p:nvPr/>
-        </p:nvSpPr>
-        <p:spPr>
-          <a:xfrm>
-            <a:off x="548640" y="4023360"/>
-            <a:ext cx="8046720" cy="731520"/>
-          </a:xfrm>
-          <a:prstGeom prst="rect">
-            <a:avLst/>
-          </a:prstGeom>
-          <a:noFill/>
-          <a:ln/>
-        </p:spPr>
-        <p:txBody>
-          <a:bodyPr wrap="square" lIns="0" tIns="0" rIns="0" bIns="0" rtlCol="0" anchor="ctr"/>
-          <a:lstStyle/>
-          <a:p>
-            <a:pPr marL="0" indent="0">
-              <a:lnSpc>
-                <a:spcPct val="140000"/>
-              </a:lnSpc>
-              <a:buNone/>
-            </a:pPr>
-            <a:r>
-              <a:rPr lang="en-US" sz="1200" dirty="0">
-                <a:solidFill>
-                  <a:srgbClr val="94A3B8"/>
-                </a:solidFill>
-                <a:latin typeface="Calibri" pitchFamily="34" charset="0"/>
-                <a:ea typeface="Calibri" pitchFamily="34" charset="-122"/>
-                <a:cs typeface="Calibri" pitchFamily="34" charset="-120"/>
-              </a:rPr>
-              <a:t>The network learned general patterns — not memorized images.</a:t>
-            </a:r>
-            <a:endParaRPr lang="en-US" sz="1200" dirty="0"/>
-          </a:p>
-          <a:p>
-            <a:pPr marL="0" indent="0">
-              <a:lnSpc>
-                <a:spcPct val="140000"/>
-              </a:lnSpc>
-              <a:buNone/>
-            </a:pPr>
-            <a:r>
-              <a:rPr lang="en-US" sz="1200" dirty="0">
-                <a:solidFill>
-                  <a:srgbClr val="94A3B8"/>
-                </a:solidFill>
-                <a:latin typeface="Calibri" pitchFamily="34" charset="0"/>
-                <a:ea typeface="Calibri" pitchFamily="34" charset="-122"/>
-                <a:cs typeface="Calibri" pitchFamily="34" charset="-120"/>
-              </a:rPr>
-              <a:t>97.8% accuracy on images it never saw during training.</a:t>
-            </a:r>
-            <a:endParaRPr lang="en-US" sz="1200" dirty="0"/>
-          </a:p>
-        </p:txBody>
-      </p:sp>
+      <p:pic>
+        <p:nvPicPr>
+          <p:cNvPr id="14" name="Picture 13" descr="The image displays a colorful, complex pattern of overlaid grids, each representing a different number from zero to nine, arranged in a grid format.&#10;&#10;AI-generated content may be incorrect.">
+            <a:extLst>
+              <a:ext uri="{FF2B5EF4-FFF2-40B4-BE49-F238E27FC236}">
+                <a16:creationId xmlns:a16="http://schemas.microsoft.com/office/drawing/2014/main" id="{079DE47E-00DF-4007-CCC6-0753D3D31976}"/>
+              </a:ext>
+            </a:extLst>
+          </p:cNvPr>
+          <p:cNvPicPr>
+            <a:picLocks noChangeAspect="1"/>
+          </p:cNvPicPr>
+          <p:nvPr/>
+        </p:nvPicPr>
+        <p:blipFill>
+          <a:blip r:embed="rId3"/>
+          <a:stretch>
+            <a:fillRect/>
+          </a:stretch>
+        </p:blipFill>
+        <p:spPr>
+          <a:xfrm>
+            <a:off x="1022252" y="1742019"/>
+            <a:ext cx="7282375" cy="3328243"/>
+          </a:xfrm>
+          <a:prstGeom prst="rect">
+            <a:avLst/>
+          </a:prstGeom>
+        </p:spPr>
+      </p:pic>
     </p:spTree>
   </p:cSld>
   <p:clrMapOvr>
@@ -5061,7 +5518,7 @@
               <a:buNone/>
             </a:pPr>
             <a:r>
-              <a:rPr lang="en-US" sz="1100" dirty="0">
+              <a:rPr lang="en-US" sz="1100" dirty="0" err="1">
                 <a:solidFill>
                   <a:srgbClr val="94A3B8"/>
                 </a:solidFill>
@@ -5069,7 +5526,18 @@
                 <a:ea typeface="Calibri" pitchFamily="34" charset="-122"/>
                 <a:cs typeface="Calibri" pitchFamily="34" charset="-120"/>
               </a:rPr>
-              <a:t>He init: random × √(2/fan_in)</a:t>
+              <a:t>init</a:t>
+            </a:r>
+            <a:r>
+              <a:rPr lang="en-US" sz="1100" dirty="0">
+                <a:solidFill>
+                  <a:srgbClr val="94A3B8"/>
+                </a:solidFill>
+                <a:latin typeface="Calibri" pitchFamily="34" charset="0"/>
+                <a:ea typeface="Calibri" pitchFamily="34" charset="-122"/>
+                <a:cs typeface="Calibri" pitchFamily="34" charset="-120"/>
+              </a:rPr>
+              <a:t>: random × √(2/fan_in)</a:t>
             </a:r>
             <a:endParaRPr lang="en-US" sz="1100" dirty="0"/>
           </a:p>
@@ -12248,7 +12716,7 @@
         </p:nvSpPr>
         <p:spPr>
           <a:xfrm>
-            <a:off x="5486400" y="2011680"/>
+            <a:off x="548640" y="3428218"/>
             <a:ext cx="3108960" cy="1280160"/>
           </a:xfrm>
           <a:prstGeom prst="rect">
@@ -12282,7 +12750,7 @@
         </p:nvSpPr>
         <p:spPr>
           <a:xfrm>
-            <a:off x="5486400" y="2011680"/>
+            <a:off x="548640" y="3428218"/>
             <a:ext cx="54864" cy="1280160"/>
           </a:xfrm>
           <a:prstGeom prst="rect">
@@ -12309,7 +12777,7 @@
         </p:nvSpPr>
         <p:spPr>
           <a:xfrm>
-            <a:off x="5715000" y="2148840"/>
+            <a:off x="777240" y="3565378"/>
             <a:ext cx="2743200" cy="320040"/>
           </a:xfrm>
           <a:prstGeom prst="rect">
@@ -12348,7 +12816,7 @@
         </p:nvSpPr>
         <p:spPr>
           <a:xfrm>
-            <a:off x="5715000" y="2468880"/>
+            <a:off x="777240" y="3885418"/>
             <a:ext cx="2743200" cy="685800"/>
           </a:xfrm>
           <a:prstGeom prst="rect">
@@ -12382,45 +12850,36 @@
           </a:p>
         </p:txBody>
       </p:sp>
-      <p:sp>
-        <p:nvSpPr>
-          <p:cNvPr id="13" name="Text 11"/>
-          <p:cNvSpPr/>
-          <p:nvPr/>
-        </p:nvSpPr>
-        <p:spPr>
-          <a:xfrm>
-            <a:off x="548640" y="3657600"/>
-            <a:ext cx="8046720" cy="457200"/>
-          </a:xfrm>
-          <a:prstGeom prst="rect">
-            <a:avLst/>
-          </a:prstGeom>
-          <a:noFill/>
-          <a:ln/>
-        </p:spPr>
-        <p:txBody>
-          <a:bodyPr wrap="square" lIns="0" tIns="0" rIns="0" bIns="0" rtlCol="0" anchor="ctr"/>
-          <a:lstStyle/>
-          <a:p>
-            <a:pPr marL="0" indent="0">
-              <a:buNone/>
-            </a:pPr>
-            <a:r>
-              <a:rPr lang="en-US" sz="1200" dirty="0">
-                <a:solidFill>
-                  <a:srgbClr val="64748B"/>
-                </a:solidFill>
-                <a:latin typeface="Calibri" pitchFamily="34" charset="0"/>
-                <a:ea typeface="Calibri" pitchFamily="34" charset="-122"/>
-                <a:cs typeface="Calibri" pitchFamily="34" charset="-120"/>
-              </a:rPr>
-              <a:t>Each of the 109,386 weights gets its own gradient and its own update — 109,386 tiny improvements per batch.</a:t>
-            </a:r>
-            <a:endParaRPr lang="en-US" sz="1200" dirty="0"/>
-          </a:p>
-        </p:txBody>
-      </p:sp>
+      <p:pic>
+        <p:nvPicPr>
+          <p:cNvPr id="13" name="Picture 12" descr="The image appears to be a circular pattern with concentric, color-graded circles, possibly representing a visualization of data or a graph.&#10;&#10;AI-generated content may be incorrect.">
+            <a:extLst>
+              <a:ext uri="{FF2B5EF4-FFF2-40B4-BE49-F238E27FC236}">
+                <a16:creationId xmlns:a16="http://schemas.microsoft.com/office/drawing/2014/main" id="{B8AF31E4-E832-CFF3-B7F1-FF9458CF095F}"/>
+              </a:ext>
+            </a:extLst>
+          </p:cNvPr>
+          <p:cNvPicPr>
+            <a:picLocks noChangeAspect="1"/>
+          </p:cNvPicPr>
+          <p:nvPr/>
+        </p:nvPicPr>
+        <p:blipFill>
+          <a:blip r:embed="rId3"/>
+          <a:stretch>
+            <a:fillRect/>
+          </a:stretch>
+        </p:blipFill>
+        <p:spPr>
+          <a:xfrm>
+            <a:off x="5598944" y="1975318"/>
+            <a:ext cx="2813536" cy="2905800"/>
+          </a:xfrm>
+          <a:prstGeom prst="rect">
+            <a:avLst/>
+          </a:prstGeom>
+        </p:spPr>
+      </p:pic>
     </p:spTree>
   </p:cSld>
   <p:clrMapOvr>
